--- a/Lab 1/slides/SC2001_Project_1.pptx
+++ b/Lab 1/slides/SC2001_Project_1.pptx
@@ -1358,7 +1358,7 @@
           <a:lstStyle/>
           <a:p>
             <a:r>
-              <a:t>50 seconds. CPU means process CPU via std::clock, not elapsed wall time. Generation, copying, allocations, checks and CSV output are outside timing. See appendix for exact seeds and counting definitions.</a:t>
+              <a:t>50 seconds. Walk left to right: first explain what Part (b) generates, then explain that threshold tuning is a separate stage, then explain why validation uses fresh arrays after S is locked. The lower strip gives the fairness controls without interrupting the main story. CPU time is process CPU via std::clock; generation, copying, allocation, checks and CSV output are excluded. Error bars later are IQRs, not confidence intervals.</a:t>
             </a:r>
           </a:p>
           <a:p/>
@@ -11068,7 +11068,7 @@
               </a:defRPr>
             </a:pPr>
             <a:r>
-              <a:t>EXPERIMENTAL METHOD / (b)–(d) / 2:40–3:30</a:t>
+              <a:t>PART (b) → (c) → (d) / 2:40–3:30</a:t>
             </a:r>
           </a:p>
         </p:txBody>
@@ -11107,7 +11107,7 @@
               </a:defRPr>
             </a:pPr>
             <a:r>
-              <a:t>Choose S on tuning data; validate on fresh data</a:t>
+              <a:t>Experiment flow: from generated arrays to a fair comparison</a:t>
             </a:r>
           </a:p>
         </p:txBody>
@@ -11236,23 +11236,64 @@
       </p:sp>
       <p:sp>
         <p:nvSpPr>
-          <p:cNvPr id="7" name="Rectangle 6"/>
+          <p:cNvPr id="7" name="TextBox 6"/>
+          <p:cNvSpPr txBox="1"/>
+          <p:nvPr/>
+        </p:nvSpPr>
+        <p:spPr>
+          <a:xfrm>
+            <a:off x="640080" y="1389888"/>
+            <a:ext cx="10972800" cy="347472"/>
+          </a:xfrm>
+          <a:prstGeom prst="rect">
+            <a:avLst/>
+          </a:prstGeom>
+          <a:noFill/>
+        </p:spPr>
+        <p:txBody>
+          <a:bodyPr wrap="square" lIns="9144" rIns="9144" tIns="0" bIns="0">
+            <a:spAutoFit/>
+          </a:bodyPr>
+          <a:lstStyle/>
+          <a:p>
+            <a:pPr>
+              <a:spcAft>
+                <a:spcPts val="800"/>
+              </a:spcAft>
+              <a:defRPr sz="1800" b="0">
+                <a:solidFill>
+                  <a:srgbClr val="566779"/>
+                </a:solidFill>
+                <a:latin typeface="Arial"/>
+              </a:defRPr>
+            </a:pPr>
+            <a:r>
+              <a:t>Part (b) creates the inputs. We then use those inputs to choose S and test it on fresh data.</a:t>
+            </a:r>
+          </a:p>
+        </p:txBody>
+      </p:sp>
+      <p:sp>
+        <p:nvSpPr>
+          <p:cNvPr id="8" name="Rounded Rectangle 7"/>
           <p:cNvSpPr/>
           <p:nvPr/>
         </p:nvSpPr>
         <p:spPr>
           <a:xfrm>
-            <a:off x="594360" y="1783080"/>
-            <a:ext cx="3611880" cy="1508760"/>
-          </a:xfrm>
-          <a:prstGeom prst="rect">
+            <a:off x="594360" y="1901952"/>
+            <a:ext cx="3401568" cy="2331720"/>
+          </a:xfrm>
+          <a:prstGeom prst="roundRect">
             <a:avLst/>
           </a:prstGeom>
           <a:solidFill>
             <a:srgbClr val="EEF3F7"/>
           </a:solidFill>
           <a:ln>
-            <a:noFill/>
+            <a:solidFill>
+              <a:srgbClr val="D5E0E8"/>
+            </a:solidFill>
           </a:ln>
           <a:effectLst/>
         </p:spPr>
@@ -11280,14 +11321,14 @@
       </p:sp>
       <p:sp>
         <p:nvSpPr>
-          <p:cNvPr id="8" name="Rectangle 7"/>
+          <p:cNvPr id="9" name="Rectangle 8"/>
           <p:cNvSpPr/>
           <p:nvPr/>
         </p:nvSpPr>
         <p:spPr>
           <a:xfrm>
-            <a:off x="594360" y="1783080"/>
-            <a:ext cx="50292" cy="1508760"/>
+            <a:off x="777240" y="2103120"/>
+            <a:ext cx="502920" cy="502920"/>
           </a:xfrm>
           <a:prstGeom prst="rect">
             <a:avLst/>
@@ -11324,14 +11365,14 @@
       </p:sp>
       <p:sp>
         <p:nvSpPr>
-          <p:cNvPr id="9" name="TextBox 8"/>
+          <p:cNvPr id="10" name="TextBox 9"/>
           <p:cNvSpPr txBox="1"/>
           <p:nvPr/>
         </p:nvSpPr>
         <p:spPr>
           <a:xfrm>
-            <a:off x="758952" y="1892807"/>
-            <a:ext cx="3282696" cy="365760"/>
+            <a:off x="777240" y="2176272"/>
+            <a:ext cx="502920" cy="228600"/>
           </a:xfrm>
           <a:prstGeom prst="rect">
             <a:avLst/>
@@ -11344,33 +11385,33 @@
           </a:bodyPr>
           <a:lstStyle/>
           <a:p>
-            <a:pPr>
-              <a:spcAft>
-                <a:spcPts val="800"/>
-              </a:spcAft>
-              <a:defRPr sz="2000" b="1">
-                <a:solidFill>
-                  <a:srgbClr val="176B9B"/>
-                </a:solidFill>
-                <a:latin typeface="Arial"/>
-              </a:defRPr>
-            </a:pPr>
-            <a:r>
-              <a:t>01  Generate</a:t>
-            </a:r>
-          </a:p>
-        </p:txBody>
-      </p:sp>
-      <p:sp>
-        <p:nvSpPr>
-          <p:cNvPr id="10" name="TextBox 9"/>
+            <a:pPr algn="ctr">
+              <a:spcAft>
+                <a:spcPts val="800"/>
+              </a:spcAft>
+              <a:defRPr sz="1500" b="1">
+                <a:solidFill>
+                  <a:srgbClr val="FFFFFF"/>
+                </a:solidFill>
+                <a:latin typeface="Arial"/>
+              </a:defRPr>
+            </a:pPr>
+            <a:r>
+              <a:t>01</a:t>
+            </a:r>
+          </a:p>
+        </p:txBody>
+      </p:sp>
+      <p:sp>
+        <p:nvSpPr>
+          <p:cNvPr id="11" name="TextBox 10"/>
           <p:cNvSpPr txBox="1"/>
           <p:nvPr/>
         </p:nvSpPr>
         <p:spPr>
           <a:xfrm>
-            <a:off x="758952" y="2286000"/>
-            <a:ext cx="3282696" cy="960119"/>
+            <a:off x="1435608" y="2139696"/>
+            <a:ext cx="2286000" cy="320040"/>
           </a:xfrm>
           <a:prstGeom prst="rect">
             <a:avLst/>
@@ -11387,7 +11428,101 @@
               <a:spcAft>
                 <a:spcPts val="800"/>
               </a:spcAft>
-              <a:defRPr sz="1600" b="0">
+              <a:defRPr sz="1900" b="1">
+                <a:solidFill>
+                  <a:srgbClr val="176B9B"/>
+                </a:solidFill>
+                <a:latin typeface="Arial"/>
+              </a:defRPr>
+            </a:pPr>
+            <a:r>
+              <a:t>GENERATE</a:t>
+            </a:r>
+          </a:p>
+        </p:txBody>
+      </p:sp>
+      <p:sp>
+        <p:nvSpPr>
+          <p:cNvPr id="12" name="TextBox 11"/>
+          <p:cNvSpPr txBox="1"/>
+          <p:nvPr/>
+        </p:nvSpPr>
+        <p:spPr>
+          <a:xfrm>
+            <a:off x="795528" y="2724912"/>
+            <a:ext cx="2999232" cy="1078992"/>
+          </a:xfrm>
+          <a:prstGeom prst="rect">
+            <a:avLst/>
+          </a:prstGeom>
+          <a:noFill/>
+        </p:spPr>
+        <p:txBody>
+          <a:bodyPr wrap="square" lIns="9144" rIns="9144" tIns="0" bIns="0">
+            <a:spAutoFit/>
+          </a:bodyPr>
+          <a:lstStyle/>
+          <a:p>
+            <a:pPr>
+              <a:spcAft>
+                <a:spcPts val="800"/>
+              </a:spcAft>
+              <a:defRPr sz="1500" b="0">
+                <a:solidFill>
+                  <a:srgbClr val="12283E"/>
+                </a:solidFill>
+                <a:latin typeface="Arial"/>
+              </a:defRPr>
+            </a:pPr>
+            <a:r>
+              <a:t>Uniform integers in [1, 10⁷]</a:t>
+            </a:r>
+          </a:p>
+          <a:p>
+            <a:pPr>
+              <a:spcAft>
+                <a:spcPts val="800"/>
+              </a:spcAft>
+              <a:defRPr sz="1500" b="0">
+                <a:solidFill>
+                  <a:srgbClr val="12283E"/>
+                </a:solidFill>
+                <a:latin typeface="Arial"/>
+              </a:defRPr>
+            </a:pPr>
+            <a:r>
+              <a:t>9 sizes: 1,000 → 10,000,000</a:t>
+            </a:r>
+          </a:p>
+        </p:txBody>
+      </p:sp>
+      <p:sp>
+        <p:nvSpPr>
+          <p:cNvPr id="13" name="TextBox 12"/>
+          <p:cNvSpPr txBox="1"/>
+          <p:nvPr/>
+        </p:nvSpPr>
+        <p:spPr>
+          <a:xfrm>
+            <a:off x="795528" y="3877056"/>
+            <a:ext cx="2999232" cy="228600"/>
+          </a:xfrm>
+          <a:prstGeom prst="rect">
+            <a:avLst/>
+          </a:prstGeom>
+          <a:noFill/>
+        </p:spPr>
+        <p:txBody>
+          <a:bodyPr wrap="square" lIns="9144" rIns="9144" tIns="0" bIns="0">
+            <a:spAutoFit/>
+          </a:bodyPr>
+          <a:lstStyle/>
+          <a:p>
+            <a:pPr>
+              <a:spcAft>
+                <a:spcPts val="800"/>
+              </a:spcAft>
+              <a:defRPr sz="1300" b="1">
                 <a:solidFill>
                   <a:srgbClr val="566779"/>
                 </a:solidFill>
@@ -11395,43 +11530,108 @@
               </a:defRPr>
             </a:pPr>
             <a:r>
-              <a:t>Uniform integers in [1, 10⁷]</a:t>
-            </a:r>
-          </a:p>
-          <a:p>
-            <a:pPr>
-              <a:spcAft>
-                <a:spcPts val="800"/>
-              </a:spcAft>
-              <a:defRPr sz="1600" b="0">
-                <a:solidFill>
-                  <a:srgbClr val="566779"/>
-                </a:solidFill>
-                <a:latin typeface="Arial"/>
-              </a:defRPr>
-            </a:pPr>
-            <a:r>
-              <a:t>Nine sizes: 10³ to 10⁷</a:t>
-            </a:r>
-          </a:p>
-        </p:txBody>
-      </p:sp>
-      <p:sp>
-        <p:nvSpPr>
-          <p:cNvPr id="11" name="Rectangle 10"/>
+              <a:t>Why: isolate the effect of n</a:t>
+            </a:r>
+          </a:p>
+        </p:txBody>
+      </p:sp>
+      <p:cxnSp>
+        <p:nvCxnSpPr>
+          <p:cNvPr id="14" name="Connector 13"/>
+          <p:cNvCxnSpPr/>
+          <p:nvPr/>
+        </p:nvCxnSpPr>
+        <p:spPr>
+          <a:xfrm>
+            <a:off x="4032504" y="3063240"/>
+            <a:ext cx="329184" cy="0"/>
+          </a:xfrm>
+          <a:prstGeom prst="line">
+            <a:avLst/>
+          </a:prstGeom>
+          <a:ln w="31750">
+            <a:solidFill>
+              <a:srgbClr val="566779"/>
+            </a:solidFill>
+          </a:ln>
+        </p:spPr>
+        <p:style>
+          <a:lnRef idx="2">
+            <a:schemeClr val="accent1"/>
+          </a:lnRef>
+          <a:fillRef idx="0">
+            <a:schemeClr val="accent1"/>
+          </a:fillRef>
+          <a:effectRef idx="1">
+            <a:schemeClr val="accent1"/>
+          </a:effectRef>
+          <a:fontRef idx="minor">
+            <a:schemeClr val="tx1"/>
+          </a:fontRef>
+        </p:style>
+      </p:cxnSp>
+      <p:sp>
+        <p:nvSpPr>
+          <p:cNvPr id="15" name="Rounded Rectangle 14"/>
           <p:cNvSpPr/>
           <p:nvPr/>
         </p:nvSpPr>
         <p:spPr>
           <a:xfrm>
-            <a:off x="4434840" y="1783080"/>
-            <a:ext cx="3611880" cy="1508760"/>
-          </a:xfrm>
-          <a:prstGeom prst="rect">
+            <a:off x="4453128" y="1901952"/>
+            <a:ext cx="3401568" cy="2331720"/>
+          </a:xfrm>
+          <a:prstGeom prst="roundRect">
             <a:avLst/>
           </a:prstGeom>
           <a:solidFill>
             <a:srgbClr val="EEF3F7"/>
+          </a:solidFill>
+          <a:ln>
+            <a:solidFill>
+              <a:srgbClr val="D5E0E8"/>
+            </a:solidFill>
+          </a:ln>
+          <a:effectLst/>
+        </p:spPr>
+        <p:style>
+          <a:lnRef idx="1">
+            <a:schemeClr val="accent1"/>
+          </a:lnRef>
+          <a:fillRef idx="3">
+            <a:schemeClr val="accent1"/>
+          </a:fillRef>
+          <a:effectRef idx="2">
+            <a:schemeClr val="accent1"/>
+          </a:effectRef>
+          <a:fontRef idx="minor">
+            <a:schemeClr val="lt1"/>
+          </a:fontRef>
+        </p:style>
+        <p:txBody>
+          <a:bodyPr rtlCol="0" anchor="ctr"/>
+          <a:lstStyle/>
+          <a:p>
+            <a:pPr algn="ctr"/>
+          </a:p>
+        </p:txBody>
+      </p:sp>
+      <p:sp>
+        <p:nvSpPr>
+          <p:cNvPr id="16" name="Rectangle 15"/>
+          <p:cNvSpPr/>
+          <p:nvPr/>
+        </p:nvSpPr>
+        <p:spPr>
+          <a:xfrm>
+            <a:off x="4636008" y="2103120"/>
+            <a:ext cx="502920" cy="502920"/>
+          </a:xfrm>
+          <a:prstGeom prst="rect">
+            <a:avLst/>
+          </a:prstGeom>
+          <a:solidFill>
+            <a:srgbClr val="D96B27"/>
           </a:solidFill>
           <a:ln>
             <a:noFill/>
@@ -11462,20 +11662,289 @@
       </p:sp>
       <p:sp>
         <p:nvSpPr>
-          <p:cNvPr id="12" name="Rectangle 11"/>
+          <p:cNvPr id="17" name="TextBox 16"/>
+          <p:cNvSpPr txBox="1"/>
+          <p:nvPr/>
+        </p:nvSpPr>
+        <p:spPr>
+          <a:xfrm>
+            <a:off x="4636008" y="2176272"/>
+            <a:ext cx="502920" cy="228600"/>
+          </a:xfrm>
+          <a:prstGeom prst="rect">
+            <a:avLst/>
+          </a:prstGeom>
+          <a:noFill/>
+        </p:spPr>
+        <p:txBody>
+          <a:bodyPr wrap="square" lIns="9144" rIns="9144" tIns="0" bIns="0">
+            <a:spAutoFit/>
+          </a:bodyPr>
+          <a:lstStyle/>
+          <a:p>
+            <a:pPr algn="ctr">
+              <a:spcAft>
+                <a:spcPts val="800"/>
+              </a:spcAft>
+              <a:defRPr sz="1500" b="1">
+                <a:solidFill>
+                  <a:srgbClr val="FFFFFF"/>
+                </a:solidFill>
+                <a:latin typeface="Arial"/>
+              </a:defRPr>
+            </a:pPr>
+            <a:r>
+              <a:t>02</a:t>
+            </a:r>
+          </a:p>
+        </p:txBody>
+      </p:sp>
+      <p:sp>
+        <p:nvSpPr>
+          <p:cNvPr id="18" name="TextBox 17"/>
+          <p:cNvSpPr txBox="1"/>
+          <p:nvPr/>
+        </p:nvSpPr>
+        <p:spPr>
+          <a:xfrm>
+            <a:off x="5294376" y="2139696"/>
+            <a:ext cx="2286000" cy="320040"/>
+          </a:xfrm>
+          <a:prstGeom prst="rect">
+            <a:avLst/>
+          </a:prstGeom>
+          <a:noFill/>
+        </p:spPr>
+        <p:txBody>
+          <a:bodyPr wrap="square" lIns="9144" rIns="9144" tIns="0" bIns="0">
+            <a:spAutoFit/>
+          </a:bodyPr>
+          <a:lstStyle/>
+          <a:p>
+            <a:pPr>
+              <a:spcAft>
+                <a:spcPts val="800"/>
+              </a:spcAft>
+              <a:defRPr sz="1900" b="1">
+                <a:solidFill>
+                  <a:srgbClr val="D96B27"/>
+                </a:solidFill>
+                <a:latin typeface="Arial"/>
+              </a:defRPr>
+            </a:pPr>
+            <a:r>
+              <a:t>TUNE S</a:t>
+            </a:r>
+          </a:p>
+        </p:txBody>
+      </p:sp>
+      <p:sp>
+        <p:nvSpPr>
+          <p:cNvPr id="19" name="TextBox 18"/>
+          <p:cNvSpPr txBox="1"/>
+          <p:nvPr/>
+        </p:nvSpPr>
+        <p:spPr>
+          <a:xfrm>
+            <a:off x="4654296" y="2724912"/>
+            <a:ext cx="2999232" cy="1078992"/>
+          </a:xfrm>
+          <a:prstGeom prst="rect">
+            <a:avLst/>
+          </a:prstGeom>
+          <a:noFill/>
+        </p:spPr>
+        <p:txBody>
+          <a:bodyPr wrap="square" lIns="9144" rIns="9144" tIns="0" bIns="0">
+            <a:spAutoFit/>
+          </a:bodyPr>
+          <a:lstStyle/>
+          <a:p>
+            <a:pPr>
+              <a:spcAft>
+                <a:spcPts val="800"/>
+              </a:spcAft>
+              <a:defRPr sz="1500" b="0">
+                <a:solidFill>
+                  <a:srgbClr val="12283E"/>
+                </a:solidFill>
+                <a:latin typeface="Arial"/>
+              </a:defRPr>
+            </a:pPr>
+            <a:r>
+              <a:t>Sweep candidate thresholds</a:t>
+            </a:r>
+          </a:p>
+          <a:p>
+            <a:pPr>
+              <a:spcAft>
+                <a:spcPts val="800"/>
+              </a:spcAft>
+              <a:defRPr sz="1500" b="0">
+                <a:solidFill>
+                  <a:srgbClr val="12283E"/>
+                </a:solidFill>
+                <a:latin typeface="Arial"/>
+              </a:defRPr>
+            </a:pPr>
+            <a:r>
+              <a:t>5 seeds × 3 timing repeats</a:t>
+            </a:r>
+          </a:p>
+          <a:p>
+            <a:pPr>
+              <a:spcAft>
+                <a:spcPts val="800"/>
+              </a:spcAft>
+              <a:defRPr sz="1500" b="0">
+                <a:solidFill>
+                  <a:srgbClr val="12283E"/>
+                </a:solidFill>
+                <a:latin typeface="Arial"/>
+              </a:defRPr>
+            </a:pPr>
+            <a:r>
+              <a:t>Choose the lowest median CPU time</a:t>
+            </a:r>
+          </a:p>
+        </p:txBody>
+      </p:sp>
+      <p:sp>
+        <p:nvSpPr>
+          <p:cNvPr id="20" name="TextBox 19"/>
+          <p:cNvSpPr txBox="1"/>
+          <p:nvPr/>
+        </p:nvSpPr>
+        <p:spPr>
+          <a:xfrm>
+            <a:off x="4654296" y="3877056"/>
+            <a:ext cx="2999232" cy="228600"/>
+          </a:xfrm>
+          <a:prstGeom prst="rect">
+            <a:avLst/>
+          </a:prstGeom>
+          <a:noFill/>
+        </p:spPr>
+        <p:txBody>
+          <a:bodyPr wrap="square" lIns="9144" rIns="9144" tIns="0" bIns="0">
+            <a:spAutoFit/>
+          </a:bodyPr>
+          <a:lstStyle/>
+          <a:p>
+            <a:pPr>
+              <a:spcAft>
+                <a:spcPts val="800"/>
+              </a:spcAft>
+              <a:defRPr sz="1300" b="1">
+                <a:solidFill>
+                  <a:srgbClr val="566779"/>
+                </a:solidFill>
+                <a:latin typeface="Arial"/>
+              </a:defRPr>
+            </a:pPr>
+            <a:r>
+              <a:t>Why: find a fast S before testing it</a:t>
+            </a:r>
+          </a:p>
+        </p:txBody>
+      </p:sp>
+      <p:cxnSp>
+        <p:nvCxnSpPr>
+          <p:cNvPr id="21" name="Connector 20"/>
+          <p:cNvCxnSpPr/>
+          <p:nvPr/>
+        </p:nvCxnSpPr>
+        <p:spPr>
+          <a:xfrm>
+            <a:off x="7891271" y="3063240"/>
+            <a:ext cx="329185" cy="0"/>
+          </a:xfrm>
+          <a:prstGeom prst="line">
+            <a:avLst/>
+          </a:prstGeom>
+          <a:ln w="31750">
+            <a:solidFill>
+              <a:srgbClr val="566779"/>
+            </a:solidFill>
+          </a:ln>
+        </p:spPr>
+        <p:style>
+          <a:lnRef idx="2">
+            <a:schemeClr val="accent1"/>
+          </a:lnRef>
+          <a:fillRef idx="0">
+            <a:schemeClr val="accent1"/>
+          </a:fillRef>
+          <a:effectRef idx="1">
+            <a:schemeClr val="accent1"/>
+          </a:effectRef>
+          <a:fontRef idx="minor">
+            <a:schemeClr val="tx1"/>
+          </a:fontRef>
+        </p:style>
+      </p:cxnSp>
+      <p:sp>
+        <p:nvSpPr>
+          <p:cNvPr id="22" name="Rounded Rectangle 21"/>
           <p:cNvSpPr/>
           <p:nvPr/>
         </p:nvSpPr>
         <p:spPr>
           <a:xfrm>
-            <a:off x="4434840" y="1783080"/>
-            <a:ext cx="50292" cy="1508760"/>
-          </a:xfrm>
-          <a:prstGeom prst="rect">
+            <a:off x="8311896" y="1901952"/>
+            <a:ext cx="3401568" cy="2331720"/>
+          </a:xfrm>
+          <a:prstGeom prst="roundRect">
             <a:avLst/>
           </a:prstGeom>
           <a:solidFill>
-            <a:srgbClr val="176B9B"/>
+            <a:srgbClr val="EEF3F7"/>
+          </a:solidFill>
+          <a:ln>
+            <a:solidFill>
+              <a:srgbClr val="D5E0E8"/>
+            </a:solidFill>
+          </a:ln>
+          <a:effectLst/>
+        </p:spPr>
+        <p:style>
+          <a:lnRef idx="1">
+            <a:schemeClr val="accent1"/>
+          </a:lnRef>
+          <a:fillRef idx="3">
+            <a:schemeClr val="accent1"/>
+          </a:fillRef>
+          <a:effectRef idx="2">
+            <a:schemeClr val="accent1"/>
+          </a:effectRef>
+          <a:fontRef idx="minor">
+            <a:schemeClr val="lt1"/>
+          </a:fontRef>
+        </p:style>
+        <p:txBody>
+          <a:bodyPr rtlCol="0" anchor="ctr"/>
+          <a:lstStyle/>
+          <a:p>
+            <a:pPr algn="ctr"/>
+          </a:p>
+        </p:txBody>
+      </p:sp>
+      <p:sp>
+        <p:nvSpPr>
+          <p:cNvPr id="23" name="Rectangle 22"/>
+          <p:cNvSpPr/>
+          <p:nvPr/>
+        </p:nvSpPr>
+        <p:spPr>
+          <a:xfrm>
+            <a:off x="8494776" y="2103120"/>
+            <a:ext cx="502920" cy="502920"/>
+          </a:xfrm>
+          <a:prstGeom prst="rect">
+            <a:avLst/>
+          </a:prstGeom>
+          <a:solidFill>
+            <a:srgbClr val="23826B"/>
           </a:solidFill>
           <a:ln>
             <a:noFill/>
@@ -11506,14 +11975,14 @@
       </p:sp>
       <p:sp>
         <p:nvSpPr>
-          <p:cNvPr id="13" name="TextBox 12"/>
+          <p:cNvPr id="24" name="TextBox 23"/>
           <p:cNvSpPr txBox="1"/>
           <p:nvPr/>
         </p:nvSpPr>
         <p:spPr>
           <a:xfrm>
-            <a:off x="4599432" y="1892807"/>
-            <a:ext cx="3282696" cy="365760"/>
+            <a:off x="8494776" y="2176272"/>
+            <a:ext cx="502920" cy="228600"/>
           </a:xfrm>
           <a:prstGeom prst="rect">
             <a:avLst/>
@@ -11526,33 +11995,33 @@
           </a:bodyPr>
           <a:lstStyle/>
           <a:p>
-            <a:pPr>
-              <a:spcAft>
-                <a:spcPts val="800"/>
-              </a:spcAft>
-              <a:defRPr sz="2000" b="1">
-                <a:solidFill>
-                  <a:srgbClr val="176B9B"/>
-                </a:solidFill>
-                <a:latin typeface="Arial"/>
-              </a:defRPr>
-            </a:pPr>
-            <a:r>
-              <a:t>02  Tune</a:t>
-            </a:r>
-          </a:p>
-        </p:txBody>
-      </p:sp>
-      <p:sp>
-        <p:nvSpPr>
-          <p:cNvPr id="14" name="TextBox 13"/>
+            <a:pPr algn="ctr">
+              <a:spcAft>
+                <a:spcPts val="800"/>
+              </a:spcAft>
+              <a:defRPr sz="1500" b="1">
+                <a:solidFill>
+                  <a:srgbClr val="FFFFFF"/>
+                </a:solidFill>
+                <a:latin typeface="Arial"/>
+              </a:defRPr>
+            </a:pPr>
+            <a:r>
+              <a:t>03</a:t>
+            </a:r>
+          </a:p>
+        </p:txBody>
+      </p:sp>
+      <p:sp>
+        <p:nvSpPr>
+          <p:cNvPr id="25" name="TextBox 24"/>
           <p:cNvSpPr txBox="1"/>
           <p:nvPr/>
         </p:nvSpPr>
         <p:spPr>
           <a:xfrm>
-            <a:off x="4599432" y="2286000"/>
-            <a:ext cx="3282696" cy="960119"/>
+            <a:off x="9153144" y="2139696"/>
+            <a:ext cx="2286000" cy="320040"/>
           </a:xfrm>
           <a:prstGeom prst="rect">
             <a:avLst/>
@@ -11569,7 +12038,117 @@
               <a:spcAft>
                 <a:spcPts val="800"/>
               </a:spcAft>
-              <a:defRPr sz="1600" b="0">
+              <a:defRPr sz="1900" b="1">
+                <a:solidFill>
+                  <a:srgbClr val="23826B"/>
+                </a:solidFill>
+                <a:latin typeface="Arial"/>
+              </a:defRPr>
+            </a:pPr>
+            <a:r>
+              <a:t>VALIDATE</a:t>
+            </a:r>
+          </a:p>
+        </p:txBody>
+      </p:sp>
+      <p:sp>
+        <p:nvSpPr>
+          <p:cNvPr id="26" name="TextBox 25"/>
+          <p:cNvSpPr txBox="1"/>
+          <p:nvPr/>
+        </p:nvSpPr>
+        <p:spPr>
+          <a:xfrm>
+            <a:off x="8513064" y="2724912"/>
+            <a:ext cx="2999232" cy="1078992"/>
+          </a:xfrm>
+          <a:prstGeom prst="rect">
+            <a:avLst/>
+          </a:prstGeom>
+          <a:noFill/>
+        </p:spPr>
+        <p:txBody>
+          <a:bodyPr wrap="square" lIns="9144" rIns="9144" tIns="0" bIns="0">
+            <a:spAutoFit/>
+          </a:bodyPr>
+          <a:lstStyle/>
+          <a:p>
+            <a:pPr>
+              <a:spcAft>
+                <a:spcPts val="800"/>
+              </a:spcAft>
+              <a:defRPr sz="1500" b="0">
+                <a:solidFill>
+                  <a:srgbClr val="12283E"/>
+                </a:solidFill>
+                <a:latin typeface="Arial"/>
+              </a:defRPr>
+            </a:pPr>
+            <a:r>
+              <a:t>Lock S = 64 before testing</a:t>
+            </a:r>
+          </a:p>
+          <a:p>
+            <a:pPr>
+              <a:spcAft>
+                <a:spcPts val="800"/>
+              </a:spcAft>
+              <a:defRPr sz="1500" b="0">
+                <a:solidFill>
+                  <a:srgbClr val="12283E"/>
+                </a:solidFill>
+                <a:latin typeface="Arial"/>
+              </a:defRPr>
+            </a:pPr>
+            <a:r>
+              <a:t>5 fresh 10m-element arrays</a:t>
+            </a:r>
+          </a:p>
+          <a:p>
+            <a:pPr>
+              <a:spcAft>
+                <a:spcPts val="800"/>
+              </a:spcAft>
+              <a:defRPr sz="1500" b="0">
+                <a:solidFill>
+                  <a:srgbClr val="12283E"/>
+                </a:solidFill>
+                <a:latin typeface="Arial"/>
+              </a:defRPr>
+            </a:pPr>
+            <a:r>
+              <a:t>Compare merge sort vs hybrid</a:t>
+            </a:r>
+          </a:p>
+        </p:txBody>
+      </p:sp>
+      <p:sp>
+        <p:nvSpPr>
+          <p:cNvPr id="27" name="TextBox 26"/>
+          <p:cNvSpPr txBox="1"/>
+          <p:nvPr/>
+        </p:nvSpPr>
+        <p:spPr>
+          <a:xfrm>
+            <a:off x="8513064" y="3877056"/>
+            <a:ext cx="2999232" cy="228600"/>
+          </a:xfrm>
+          <a:prstGeom prst="rect">
+            <a:avLst/>
+          </a:prstGeom>
+          <a:noFill/>
+        </p:spPr>
+        <p:txBody>
+          <a:bodyPr wrap="square" lIns="9144" rIns="9144" tIns="0" bIns="0">
+            <a:spAutoFit/>
+          </a:bodyPr>
+          <a:lstStyle/>
+          <a:p>
+            <a:pPr>
+              <a:spcAft>
+                <a:spcPts val="800"/>
+              </a:spcAft>
+              <a:defRPr sz="1300" b="1">
                 <a:solidFill>
                   <a:srgbClr val="566779"/>
                 </a:solidFill>
@@ -11577,46 +12156,32 @@
               </a:defRPr>
             </a:pPr>
             <a:r>
-              <a:t>Five seeds × three repetitions</a:t>
-            </a:r>
-          </a:p>
-          <a:p>
-            <a:pPr>
-              <a:spcAft>
-                <a:spcPts val="800"/>
-              </a:spcAft>
-              <a:defRPr sz="1600" b="0">
-                <a:solidFill>
-                  <a:srgbClr val="566779"/>
-                </a:solidFill>
-                <a:latin typeface="Arial"/>
-              </a:defRPr>
-            </a:pPr>
-            <a:r>
-              <a:t>Coarse sweep, then integer refinement</a:t>
-            </a:r>
-          </a:p>
-        </p:txBody>
-      </p:sp>
-      <p:sp>
-        <p:nvSpPr>
-          <p:cNvPr id="15" name="Rectangle 14"/>
+              <a:t>Why: avoid choosing S on test data</a:t>
+            </a:r>
+          </a:p>
+        </p:txBody>
+      </p:sp>
+      <p:sp>
+        <p:nvSpPr>
+          <p:cNvPr id="28" name="Rounded Rectangle 27"/>
           <p:cNvSpPr/>
           <p:nvPr/>
         </p:nvSpPr>
         <p:spPr>
           <a:xfrm>
-            <a:off x="8275320" y="1783080"/>
-            <a:ext cx="3611880" cy="1508760"/>
-          </a:xfrm>
-          <a:prstGeom prst="rect">
+            <a:off x="594360" y="4617720"/>
+            <a:ext cx="10972800" cy="1078992"/>
+          </a:xfrm>
+          <a:prstGeom prst="roundRect">
             <a:avLst/>
           </a:prstGeom>
           <a:solidFill>
-            <a:srgbClr val="EEF3F7"/>
+            <a:srgbClr val="F7FAFC"/>
           </a:solidFill>
           <a:ln>
-            <a:noFill/>
+            <a:solidFill>
+              <a:srgbClr val="D5E0E8"/>
+            </a:solidFill>
           </a:ln>
           <a:effectLst/>
         </p:spPr>
@@ -11644,58 +12209,14 @@
       </p:sp>
       <p:sp>
         <p:nvSpPr>
-          <p:cNvPr id="16" name="Rectangle 15"/>
-          <p:cNvSpPr/>
-          <p:nvPr/>
-        </p:nvSpPr>
-        <p:spPr>
-          <a:xfrm>
-            <a:off x="8275320" y="1783080"/>
-            <a:ext cx="50292" cy="1508760"/>
-          </a:xfrm>
-          <a:prstGeom prst="rect">
-            <a:avLst/>
-          </a:prstGeom>
-          <a:solidFill>
-            <a:srgbClr val="176B9B"/>
-          </a:solidFill>
-          <a:ln>
-            <a:noFill/>
-          </a:ln>
-          <a:effectLst/>
-        </p:spPr>
-        <p:style>
-          <a:lnRef idx="1">
-            <a:schemeClr val="accent1"/>
-          </a:lnRef>
-          <a:fillRef idx="3">
-            <a:schemeClr val="accent1"/>
-          </a:fillRef>
-          <a:effectRef idx="2">
-            <a:schemeClr val="accent1"/>
-          </a:effectRef>
-          <a:fontRef idx="minor">
-            <a:schemeClr val="lt1"/>
-          </a:fontRef>
-        </p:style>
-        <p:txBody>
-          <a:bodyPr rtlCol="0" anchor="ctr"/>
-          <a:lstStyle/>
-          <a:p>
-            <a:pPr algn="ctr"/>
-          </a:p>
-        </p:txBody>
-      </p:sp>
-      <p:sp>
-        <p:nvSpPr>
-          <p:cNvPr id="17" name="TextBox 16"/>
+          <p:cNvPr id="29" name="TextBox 28"/>
           <p:cNvSpPr txBox="1"/>
           <p:nvPr/>
         </p:nvSpPr>
         <p:spPr>
           <a:xfrm>
-            <a:off x="8439912" y="1892807"/>
-            <a:ext cx="3282696" cy="365760"/>
+            <a:off x="822960" y="4782312"/>
+            <a:ext cx="2834640" cy="256032"/>
           </a:xfrm>
           <a:prstGeom prst="rect">
             <a:avLst/>
@@ -11712,7 +12233,7 @@
               <a:spcAft>
                 <a:spcPts val="800"/>
               </a:spcAft>
-              <a:defRPr sz="2000" b="1">
+              <a:defRPr sz="1400" b="1">
                 <a:solidFill>
                   <a:srgbClr val="176B9B"/>
                 </a:solidFill>
@@ -11720,21 +12241,21 @@
               </a:defRPr>
             </a:pPr>
             <a:r>
-              <a:t>03  Validate</a:t>
-            </a:r>
-          </a:p>
-        </p:txBody>
-      </p:sp>
-      <p:sp>
-        <p:nvSpPr>
-          <p:cNvPr id="18" name="TextBox 17"/>
+              <a:t>CONTROLS HELD CONSTANT</a:t>
+            </a:r>
+          </a:p>
+        </p:txBody>
+      </p:sp>
+      <p:sp>
+        <p:nvSpPr>
+          <p:cNvPr id="30" name="TextBox 29"/>
           <p:cNvSpPr txBox="1"/>
           <p:nvPr/>
         </p:nvSpPr>
         <p:spPr>
           <a:xfrm>
-            <a:off x="8439912" y="2286000"/>
-            <a:ext cx="3282696" cy="960119"/>
+            <a:off x="822960" y="5184648"/>
+            <a:ext cx="3246120" cy="274320"/>
           </a:xfrm>
           <a:prstGeom prst="rect">
             <a:avLst/>
@@ -11751,45 +12272,29 @@
               <a:spcAft>
                 <a:spcPts val="800"/>
               </a:spcAft>
-              <a:defRPr sz="1600" b="0">
-                <a:solidFill>
-                  <a:srgbClr val="566779"/>
-                </a:solidFill>
-                <a:latin typeface="Arial"/>
-              </a:defRPr>
-            </a:pPr>
-            <a:r>
-              <a:t>Lock S before testing</a:t>
-            </a:r>
-          </a:p>
-          <a:p>
-            <a:pPr>
-              <a:spcAft>
-                <a:spcPts val="800"/>
-              </a:spcAft>
-              <a:defRPr sz="1600" b="0">
-                <a:solidFill>
-                  <a:srgbClr val="566779"/>
-                </a:solidFill>
-                <a:latin typeface="Arial"/>
-              </a:defRPr>
-            </a:pPr>
-            <a:r>
-              <a:t>Five fresh 10m-element datasets</a:t>
-            </a:r>
-          </a:p>
-        </p:txBody>
-      </p:sp>
-      <p:sp>
-        <p:nvSpPr>
-          <p:cNvPr id="19" name="TextBox 18"/>
+              <a:defRPr sz="1600" b="1">
+                <a:solidFill>
+                  <a:srgbClr val="12283E"/>
+                </a:solidFill>
+                <a:latin typeface="Arial"/>
+              </a:defRPr>
+            </a:pPr>
+            <a:r>
+              <a:t>Same array for every candidate</a:t>
+            </a:r>
+          </a:p>
+        </p:txBody>
+      </p:sp>
+      <p:sp>
+        <p:nvSpPr>
+          <p:cNvPr id="31" name="TextBox 30"/>
           <p:cNvSpPr txBox="1"/>
           <p:nvPr/>
         </p:nvSpPr>
         <p:spPr>
           <a:xfrm>
-            <a:off x="685800" y="3703320"/>
-            <a:ext cx="5212080" cy="365760"/>
+            <a:off x="4270248" y="5184648"/>
+            <a:ext cx="3063240" cy="274320"/>
           </a:xfrm>
           <a:prstGeom prst="rect">
             <a:avLst/>
@@ -11806,29 +12311,29 @@
               <a:spcAft>
                 <a:spcPts val="800"/>
               </a:spcAft>
-              <a:defRPr sz="2400" b="1">
-                <a:solidFill>
-                  <a:srgbClr val="176B9B"/>
-                </a:solidFill>
-                <a:latin typeface="Arial"/>
-              </a:defRPr>
-            </a:pPr>
-            <a:r>
-              <a:t>Fair timing</a:t>
-            </a:r>
-          </a:p>
-        </p:txBody>
-      </p:sp>
-      <p:sp>
-        <p:nvSpPr>
-          <p:cNvPr id="20" name="TextBox 19"/>
+              <a:defRPr sz="1600" b="1">
+                <a:solidFill>
+                  <a:srgbClr val="12283E"/>
+                </a:solidFill>
+                <a:latin typeface="Arial"/>
+              </a:defRPr>
+            </a:pPr>
+            <a:r>
+              <a:t>Warm-up + shuffled run order</a:t>
+            </a:r>
+          </a:p>
+        </p:txBody>
+      </p:sp>
+      <p:sp>
+        <p:nvSpPr>
+          <p:cNvPr id="32" name="TextBox 31"/>
           <p:cNvSpPr txBox="1"/>
           <p:nvPr/>
         </p:nvSpPr>
         <p:spPr>
           <a:xfrm>
-            <a:off x="685800" y="4251960"/>
-            <a:ext cx="5212080" cy="1554480"/>
+            <a:off x="7543800" y="5184648"/>
+            <a:ext cx="3657600" cy="274320"/>
           </a:xfrm>
           <a:prstGeom prst="rect">
             <a:avLst/>
@@ -11845,7 +12350,7 @@
               <a:spcAft>
                 <a:spcPts val="800"/>
               </a:spcAft>
-              <a:defRPr sz="2100" b="0">
+              <a:defRPr sz="1600" b="1">
                 <a:solidFill>
                   <a:srgbClr val="12283E"/>
                 </a:solidFill>
@@ -11853,53 +12358,21 @@
               </a:defRPr>
             </a:pPr>
             <a:r>
-              <a:t>Same arrays across candidates</a:t>
-            </a:r>
-          </a:p>
-          <a:p>
-            <a:pPr>
-              <a:spcAft>
-                <a:spcPts val="800"/>
-              </a:spcAft>
-              <a:defRPr sz="2100" b="0">
-                <a:solidFill>
-                  <a:srgbClr val="12283E"/>
-                </a:solidFill>
-                <a:latin typeface="Arial"/>
-              </a:defRPr>
-            </a:pPr>
-            <a:r>
-              <a:t>Warm-up + shuffled run order</a:t>
-            </a:r>
-          </a:p>
-          <a:p>
-            <a:pPr>
-              <a:spcAft>
-                <a:spcPts val="800"/>
-              </a:spcAft>
-              <a:defRPr sz="2100" b="0">
-                <a:solidFill>
-                  <a:srgbClr val="12283E"/>
-                </a:solidFill>
-                <a:latin typeface="Arial"/>
-              </a:defRPr>
-            </a:pPr>
-            <a:r>
-              <a:t>Time sorting only; compile counters out</a:t>
-            </a:r>
-          </a:p>
-        </p:txBody>
-      </p:sp>
-      <p:sp>
-        <p:nvSpPr>
-          <p:cNvPr id="21" name="TextBox 20"/>
+              <a:t>Sort only is timed; counters run separately</a:t>
+            </a:r>
+          </a:p>
+        </p:txBody>
+      </p:sp>
+      <p:sp>
+        <p:nvSpPr>
+          <p:cNvPr id="33" name="TextBox 32"/>
           <p:cNvSpPr txBox="1"/>
           <p:nvPr/>
         </p:nvSpPr>
         <p:spPr>
           <a:xfrm>
-            <a:off x="6400800" y="3703320"/>
-            <a:ext cx="5029200" cy="365760"/>
+            <a:off x="685800" y="5989320"/>
+            <a:ext cx="10972800" cy="274320"/>
           </a:xfrm>
           <a:prstGeom prst="rect">
             <a:avLst/>
@@ -11916,116 +12389,6 @@
               <a:spcAft>
                 <a:spcPts val="800"/>
               </a:spcAft>
-              <a:defRPr sz="2400" b="1">
-                <a:solidFill>
-                  <a:srgbClr val="176B9B"/>
-                </a:solidFill>
-                <a:latin typeface="Arial"/>
-              </a:defRPr>
-            </a:pPr>
-            <a:r>
-              <a:t>Trustworthy evidence</a:t>
-            </a:r>
-          </a:p>
-        </p:txBody>
-      </p:sp>
-      <p:sp>
-        <p:nvSpPr>
-          <p:cNvPr id="22" name="TextBox 21"/>
-          <p:cNvSpPr txBox="1"/>
-          <p:nvPr/>
-        </p:nvSpPr>
-        <p:spPr>
-          <a:xfrm>
-            <a:off x="6400800" y="4251960"/>
-            <a:ext cx="5029200" cy="1554480"/>
-          </a:xfrm>
-          <a:prstGeom prst="rect">
-            <a:avLst/>
-          </a:prstGeom>
-          <a:noFill/>
-        </p:spPr>
-        <p:txBody>
-          <a:bodyPr wrap="square" lIns="9144" rIns="9144" tIns="0" bIns="0">
-            <a:spAutoFit/>
-          </a:bodyPr>
-          <a:lstStyle/>
-          <a:p>
-            <a:pPr>
-              <a:spcAft>
-                <a:spcPts val="800"/>
-              </a:spcAft>
-              <a:defRPr sz="2100" b="0">
-                <a:solidFill>
-                  <a:srgbClr val="12283E"/>
-                </a:solidFill>
-                <a:latin typeface="Arial"/>
-              </a:defRPr>
-            </a:pPr>
-            <a:r>
-              <a:t>Every output checked against std::sort</a:t>
-            </a:r>
-          </a:p>
-          <a:p>
-            <a:pPr>
-              <a:spcAft>
-                <a:spcPts val="800"/>
-              </a:spcAft>
-              <a:defRPr sz="2100" b="0">
-                <a:solidFill>
-                  <a:srgbClr val="12283E"/>
-                </a:solidFill>
-                <a:latin typeface="Arial"/>
-              </a:defRPr>
-            </a:pPr>
-            <a:r>
-              <a:t>Median within seed, then across seeds</a:t>
-            </a:r>
-          </a:p>
-          <a:p>
-            <a:pPr>
-              <a:spcAft>
-                <a:spcPts val="800"/>
-              </a:spcAft>
-              <a:defRPr sz="2100" b="0">
-                <a:solidFill>
-                  <a:srgbClr val="12283E"/>
-                </a:solidFill>
-                <a:latin typeface="Arial"/>
-              </a:defRPr>
-            </a:pPr>
-            <a:r>
-              <a:t>Error bands = IQR, not confidence intervals</a:t>
-            </a:r>
-          </a:p>
-        </p:txBody>
-      </p:sp>
-      <p:sp>
-        <p:nvSpPr>
-          <p:cNvPr id="23" name="TextBox 22"/>
-          <p:cNvSpPr txBox="1"/>
-          <p:nvPr/>
-        </p:nvSpPr>
-        <p:spPr>
-          <a:xfrm>
-            <a:off x="685800" y="5989320"/>
-            <a:ext cx="10972800" cy="274320"/>
-          </a:xfrm>
-          <a:prstGeom prst="rect">
-            <a:avLst/>
-          </a:prstGeom>
-          <a:noFill/>
-        </p:spPr>
-        <p:txBody>
-          <a:bodyPr wrap="square" lIns="9144" rIns="9144" tIns="0" bIns="0">
-            <a:spAutoFit/>
-          </a:bodyPr>
-          <a:lstStyle/>
-          <a:p>
-            <a:pPr>
-              <a:spcAft>
-                <a:spcPts val="800"/>
-              </a:spcAft>
               <a:defRPr sz="1500" b="0">
                 <a:solidFill>
                   <a:srgbClr val="566779"/>
@@ -12034,7 +12397,7 @@
               </a:defRPr>
             </a:pPr>
             <a:r>
-              <a:t>Apple M5  •  C++17 / Apple clang 21 / -O3  •  separate key-comparison passes</a:t>
+              <a:t>Every output checked against std::sort  •  Apple M5 / C++17 / -O3</a:t>
             </a:r>
           </a:p>
         </p:txBody>
